--- a/decks/hist-renaissance-medicine/hist-renaissance-medicine_ch4_treatment-and-care.pptx
+++ b/decks/hist-renaissance-medicine/hist-renaissance-medicine_ch4_treatment-and-care.pptx
@@ -130,31 +130,31 @@
   <p:extLst>
     <p:ext uri="{521415D9-36F7-43E2-AB2F-B90AF26B5E84}">
       <p14:sectionLst xmlns:p14="http://schemas.microsoft.com/office/powerpoint/2010/main">
-        <p14:section name="Opening" id="{6765b3f5-c05f-c758-6386-6612d6467823}">
+        <p14:section name="Opening" id="{2a2beebf-d1d7-8dee-b685-0f69df9b0dca}">
           <p14:sldIdLst>
             <p14:sldId id="256"/>
           </p14:sldIdLst>
         </p14:section>
-        <p14:section name="Gate" id="{f7992eed-41b7-ce36-fffd-e70c6c15d101}">
+        <p14:section name="Gate" id="{decf21b5-6e60-f4d7-2d69-94080c595379}">
           <p14:sldIdLst>
             <p14:sldId id="257"/>
             <p14:sldId id="258"/>
             <p14:sldId id="259"/>
           </p14:sldIdLst>
         </p14:section>
-        <p14:section name="Pre-teach" id="{8d959046-a41a-7ac2-d623-18699c6d1326}">
+        <p14:section name="Pre-teach" id="{f6fdf770-88e6-0d31-c8eb-bbb3b21c2c47}">
           <p14:sldIdLst>
             <p14:sldId id="260"/>
             <p14:sldId id="261"/>
           </p14:sldIdLst>
         </p14:section>
-        <p14:section name="Read-along" id="{86fe5165-45df-7f27-0646-fda484c9baed}">
+        <p14:section name="Read-along" id="{f617606d-ca90-2b2c-f3e9-912d0b5a9f01}">
           <p14:sldIdLst>
             <p14:sldId id="262"/>
             <p14:sldId id="263"/>
           </p14:sldIdLst>
         </p14:section>
-        <p14:section name="Teach" id="{653a5313-deee-b3d8-4c17-1af8ed634096}">
+        <p14:section name="Teach" id="{527f184b-c930-6b75-7edf-20334ac5db2c}">
           <p14:sldIdLst>
             <p14:sldId id="264"/>
             <p14:sldId id="265"/>
@@ -164,7 +164,7 @@
             <p14:sldId id="269"/>
           </p14:sldIdLst>
         </p14:section>
-        <p14:section name="Routes" id="{7df71d1b-f8d8-f56e-90a5-502a25b75d56}">
+        <p14:section name="Routes" id="{d76a88fd-0b8c-4839-29a2-c466001656c8}">
           <p14:sldIdLst>
             <p14:sldId id="270"/>
             <p14:sldId id="271"/>
@@ -174,12 +174,12 @@
             <p14:sldId id="275"/>
           </p14:sldIdLst>
         </p14:section>
-        <p14:section name="Close" id="{eeef8af7-cebe-5f0f-0102-7c1363176da6}">
+        <p14:section name="Close" id="{9fd90eaf-4602-f61e-66c2-b74ec41e6110}">
           <p14:sldIdLst>
             <p14:sldId id="276"/>
           </p14:sldIdLst>
         </p14:section>
-        <p14:section name="Answers" id="{d74d7e9f-a471-0506-fb2f-bccd69cd8740}">
+        <p14:section name="Answers" id="{4a5b115b-4b05-d630-9f5c-0a4e06f612cb}">
           <p14:sldIdLst>
             <p14:sldId id="277"/>
             <p14:sldId id="278"/>
